--- a/hercules2026_A_intro.pptx
+++ b/hercules2026_A_intro.pptx
@@ -249,7 +249,7 @@
             <a:fld id="{D680E798-53FF-4C51-A981-953463752515}" type="datetimeFigureOut">
               <a:rPr lang="fr-FR" smtClean="0"/>
               <a:pPr/>
-              <a:t>11/03/2025</a:t>
+              <a:t>23/02/2026</a:t>
             </a:fld>
             <a:endParaRPr lang="fr-FR"/>
           </a:p>
@@ -766,7 +766,7 @@
           <a:p>
             <a:r>
               <a:rPr lang="en-US" noProof="0"/>
-              <a:t>OASYS-Intro | HERCULES2025</a:t>
+              <a:t>OASYS-Intro | HERCULES2026</a:t>
             </a:r>
             <a:endParaRPr lang="en-US" noProof="0" dirty="0"/>
           </a:p>
@@ -1095,7 +1095,7 @@
           <a:p>
             <a:r>
               <a:rPr lang="en-US" noProof="0"/>
-              <a:t>OASYS-Intro | HERCULES2025</a:t>
+              <a:t>OASYS-Intro | HERCULES2026</a:t>
             </a:r>
           </a:p>
         </p:txBody>
@@ -1282,7 +1282,7 @@
           <a:p>
             <a:r>
               <a:rPr lang="en-US" noProof="0"/>
-              <a:t>OASYS-Intro | HERCULES2025</a:t>
+              <a:t>OASYS-Intro | HERCULES2026</a:t>
             </a:r>
           </a:p>
         </p:txBody>
@@ -1401,7 +1401,7 @@
           <a:p>
             <a:r>
               <a:rPr lang="en-US" noProof="0"/>
-              <a:t>OASYS-Intro | HERCULES2025</a:t>
+              <a:t>OASYS-Intro | HERCULES2026</a:t>
             </a:r>
           </a:p>
         </p:txBody>
@@ -1634,7 +1634,7 @@
           <a:p>
             <a:r>
               <a:rPr lang="en-US"/>
-              <a:t>OASYS-Intro | HERCULES2025</a:t>
+              <a:t>OASYS-Intro | HERCULES2026</a:t>
             </a:r>
             <a:endParaRPr lang="fr-FR" dirty="0"/>
           </a:p>
@@ -2101,7 +2101,7 @@
           <a:p>
             <a:r>
               <a:rPr lang="en-US"/>
-              <a:t>OASYS-Intro | HERCULES2025</a:t>
+              <a:t>OASYS-Intro | HERCULES2026</a:t>
             </a:r>
             <a:endParaRPr lang="fr-FR" dirty="0"/>
           </a:p>
@@ -3167,7 +3167,7 @@
           <a:p>
             <a:r>
               <a:rPr lang="en-US" noProof="0"/>
-              <a:t>OASYS-Intro | HERCULES2025</a:t>
+              <a:t>OASYS-Intro | HERCULES2026</a:t>
             </a:r>
           </a:p>
         </p:txBody>
@@ -3517,7 +3517,7 @@
           <a:p>
             <a:r>
               <a:rPr lang="en-US" noProof="0"/>
-              <a:t>OASYS-Intro | HERCULES2025</a:t>
+              <a:t>OASYS-Intro | HERCULES2026</a:t>
             </a:r>
           </a:p>
         </p:txBody>
@@ -5092,7 +5092,7 @@
           <a:p>
             <a:r>
               <a:rPr lang="en-US" noProof="0"/>
-              <a:t>OASYS-Intro | HERCULES2025</a:t>
+              <a:t>OASYS-Intro | HERCULES2026</a:t>
             </a:r>
           </a:p>
         </p:txBody>
@@ -5403,7 +5403,7 @@
           <a:p>
             <a:r>
               <a:rPr lang="en-US" noProof="0"/>
-              <a:t>OASYS-Intro | HERCULES2025</a:t>
+              <a:t>OASYS-Intro | HERCULES2026</a:t>
             </a:r>
           </a:p>
         </p:txBody>
@@ -5840,7 +5840,7 @@
           <a:p>
             <a:r>
               <a:rPr lang="en-US" noProof="0"/>
-              <a:t>OASYS-Intro | HERCULES2025</a:t>
+              <a:t>OASYS-Intro | HERCULES2026</a:t>
             </a:r>
           </a:p>
         </p:txBody>
@@ -6005,7 +6005,7 @@
           <a:p>
             <a:r>
               <a:rPr lang="en-US" noProof="0"/>
-              <a:t>OASYS-Intro | HERCULES2025</a:t>
+              <a:t>OASYS-Intro | HERCULES2026</a:t>
             </a:r>
           </a:p>
         </p:txBody>
@@ -6296,15 +6296,15 @@
             <a:pPr algn="ctr"/>
             <a:r>
               <a:rPr lang="en-US" sz="1167" dirty="0"/>
-              <a:t>March 21</a:t>
+              <a:t>March 5</a:t>
             </a:r>
             <a:r>
               <a:rPr lang="en-US" sz="1167" baseline="30000" dirty="0"/>
-              <a:t>st</a:t>
+              <a:t>th</a:t>
             </a:r>
             <a:r>
               <a:rPr lang="en-US" sz="1167" dirty="0"/>
-              <a:t>, 2025</a:t>
+              <a:t>, 2026</a:t>
             </a:r>
           </a:p>
           <a:p>
@@ -6362,7 +6362,7 @@
           <a:p>
             <a:r>
               <a:rPr lang="en-GB" sz="833"/>
-              <a:t>OASYS-Intro | HERCULES2025</a:t>
+              <a:t>OASYS-Intro | HERCULES2026</a:t>
             </a:r>
             <a:endParaRPr lang="fr-FR" sz="833" dirty="0"/>
           </a:p>
@@ -6499,7 +6499,7 @@
           <a:p>
             <a:r>
               <a:rPr lang="en-US" noProof="0"/>
-              <a:t>OASYS-Intro | HERCULES2025</a:t>
+              <a:t>OASYS-Intro | HERCULES2026</a:t>
             </a:r>
           </a:p>
         </p:txBody>
@@ -6693,7 +6693,7 @@
           <a:p>
             <a:r>
               <a:rPr lang="en-US" noProof="0"/>
-              <a:t>OASYS-Intro | HERCULES2025</a:t>
+              <a:t>OASYS-Intro | HERCULES2026</a:t>
             </a:r>
           </a:p>
         </p:txBody>
@@ -6889,7 +6889,7 @@
           <a:p>
             <a:r>
               <a:rPr lang="en-US" noProof="0"/>
-              <a:t>OASYS-Intro | HERCULES2025</a:t>
+              <a:t>OASYS-Intro | HERCULES2026</a:t>
             </a:r>
           </a:p>
         </p:txBody>
@@ -8451,7 +8451,7 @@
           <a:p>
             <a:r>
               <a:rPr lang="en-US" noProof="0"/>
-              <a:t>OASYS-Intro | HERCULES2025</a:t>
+              <a:t>OASYS-Intro | HERCULES2026</a:t>
             </a:r>
           </a:p>
         </p:txBody>
@@ -9233,7 +9233,7 @@
           <a:p>
             <a:r>
               <a:rPr lang="en-US" noProof="0"/>
-              <a:t>OASYS-Intro | HERCULES2025</a:t>
+              <a:t>OASYS-Intro | HERCULES2026</a:t>
             </a:r>
           </a:p>
         </p:txBody>
@@ -9693,7 +9693,7 @@
           <a:p>
             <a:r>
               <a:rPr lang="en-US" noProof="0"/>
-              <a:t>OASYS-Intro | HERCULES2025</a:t>
+              <a:t>OASYS-Intro | HERCULES2026</a:t>
             </a:r>
           </a:p>
         </p:txBody>
@@ -10286,7 +10286,7 @@
           <a:p>
             <a:r>
               <a:rPr lang="en-US" noProof="0"/>
-              <a:t>OASYS-Intro | HERCULES2025</a:t>
+              <a:t>OASYS-Intro | HERCULES2026</a:t>
             </a:r>
           </a:p>
         </p:txBody>
